--- a/e2e/fixtures/parity-wave4.pptx
+++ b/e2e/fixtures/parity-wave4.pptx
@@ -26,7 +26,7 @@
       </a:defRPr>
     </a:lvl1pPr>
   </p:defaultTextStyle>
-  <p:modifyVerifier cryptProviderType="rsaAES" cryptAlgorithmClass="hash" cryptAlgorithmType="typeAny" cryptAlgorithmSid="14" spinCount="100000" saltData="Zm9v" hashData="YmFy"/>
+  <p:modifyVerifier cryptProviderType="rsaAES" cryptAlgorithmClass="hash" cryptAlgorithmType="typeAny" spinCount="100000" saltData="Zm9v" hashData="YmFy"/>
   <p:wave4Unmodelled/>
 </p:presentation>
 </file>
